--- a/Lecture 6. GUI Programming with Swing.pptx
+++ b/Lecture 6. GUI Programming with Swing.pptx
@@ -5,7 +5,7 @@
     <p:sldMasterId id="2147483648" r:id="rId1"/>
   </p:sldMasterIdLst>
   <p:notesMasterIdLst>
-    <p:notesMasterId r:id="rId27"/>
+    <p:notesMasterId r:id="rId26"/>
   </p:notesMasterIdLst>
   <p:sldIdLst>
     <p:sldId id="256" r:id="rId2"/>
@@ -32,7 +32,6 @@
     <p:sldId id="268" r:id="rId23"/>
     <p:sldId id="272" r:id="rId24"/>
     <p:sldId id="273" r:id="rId25"/>
-    <p:sldId id="274" r:id="rId26"/>
   </p:sldIdLst>
   <p:sldSz cx="9144000" cy="6858000" type="screen4x3"/>
   <p:notesSz cx="6858000" cy="9144000"/>
@@ -217,7 +216,7 @@
             <a:fld id="{FF0B2BA9-4FD0-4DC4-B70B-93231BE247F2}" type="datetimeFigureOut">
               <a:rPr lang="en-US" smtClean="0"/>
               <a:pPr/>
-              <a:t>3/10/2026</a:t>
+              <a:t>3/15/2026</a:t>
             </a:fld>
             <a:endParaRPr lang="en-US"/>
           </a:p>
@@ -3291,7 +3290,7 @@
             <a:fld id="{C3931D62-7DF2-4DB4-910C-5841F65C3738}" type="datetimeFigureOut">
               <a:rPr lang="en-US" smtClean="0"/>
               <a:pPr/>
-              <a:t>3/10/2026</a:t>
+              <a:t>3/15/2026</a:t>
             </a:fld>
             <a:endParaRPr lang="en-US"/>
           </a:p>
@@ -3458,7 +3457,7 @@
             <a:fld id="{C3931D62-7DF2-4DB4-910C-5841F65C3738}" type="datetimeFigureOut">
               <a:rPr lang="en-US" smtClean="0"/>
               <a:pPr/>
-              <a:t>3/10/2026</a:t>
+              <a:t>3/15/2026</a:t>
             </a:fld>
             <a:endParaRPr lang="en-US"/>
           </a:p>
@@ -3635,7 +3634,7 @@
             <a:fld id="{C3931D62-7DF2-4DB4-910C-5841F65C3738}" type="datetimeFigureOut">
               <a:rPr lang="en-US" smtClean="0"/>
               <a:pPr/>
-              <a:t>3/10/2026</a:t>
+              <a:t>3/15/2026</a:t>
             </a:fld>
             <a:endParaRPr lang="en-US"/>
           </a:p>
@@ -3802,7 +3801,7 @@
             <a:fld id="{C3931D62-7DF2-4DB4-910C-5841F65C3738}" type="datetimeFigureOut">
               <a:rPr lang="en-US" smtClean="0"/>
               <a:pPr/>
-              <a:t>3/10/2026</a:t>
+              <a:t>3/15/2026</a:t>
             </a:fld>
             <a:endParaRPr lang="en-US"/>
           </a:p>
@@ -4045,7 +4044,7 @@
             <a:fld id="{C3931D62-7DF2-4DB4-910C-5841F65C3738}" type="datetimeFigureOut">
               <a:rPr lang="en-US" smtClean="0"/>
               <a:pPr/>
-              <a:t>3/10/2026</a:t>
+              <a:t>3/15/2026</a:t>
             </a:fld>
             <a:endParaRPr lang="en-US"/>
           </a:p>
@@ -4330,7 +4329,7 @@
             <a:fld id="{C3931D62-7DF2-4DB4-910C-5841F65C3738}" type="datetimeFigureOut">
               <a:rPr lang="en-US" smtClean="0"/>
               <a:pPr/>
-              <a:t>3/10/2026</a:t>
+              <a:t>3/15/2026</a:t>
             </a:fld>
             <a:endParaRPr lang="en-US"/>
           </a:p>
@@ -4749,7 +4748,7 @@
             <a:fld id="{C3931D62-7DF2-4DB4-910C-5841F65C3738}" type="datetimeFigureOut">
               <a:rPr lang="en-US" smtClean="0"/>
               <a:pPr/>
-              <a:t>3/10/2026</a:t>
+              <a:t>3/15/2026</a:t>
             </a:fld>
             <a:endParaRPr lang="en-US"/>
           </a:p>
@@ -4864,7 +4863,7 @@
             <a:fld id="{C3931D62-7DF2-4DB4-910C-5841F65C3738}" type="datetimeFigureOut">
               <a:rPr lang="en-US" smtClean="0"/>
               <a:pPr/>
-              <a:t>3/10/2026</a:t>
+              <a:t>3/15/2026</a:t>
             </a:fld>
             <a:endParaRPr lang="en-US"/>
           </a:p>
@@ -4956,7 +4955,7 @@
             <a:fld id="{C3931D62-7DF2-4DB4-910C-5841F65C3738}" type="datetimeFigureOut">
               <a:rPr lang="en-US" smtClean="0"/>
               <a:pPr/>
-              <a:t>3/10/2026</a:t>
+              <a:t>3/15/2026</a:t>
             </a:fld>
             <a:endParaRPr lang="en-US"/>
           </a:p>
@@ -5230,7 +5229,7 @@
             <a:fld id="{C3931D62-7DF2-4DB4-910C-5841F65C3738}" type="datetimeFigureOut">
               <a:rPr lang="en-US" smtClean="0"/>
               <a:pPr/>
-              <a:t>3/10/2026</a:t>
+              <a:t>3/15/2026</a:t>
             </a:fld>
             <a:endParaRPr lang="en-US"/>
           </a:p>
@@ -5480,7 +5479,7 @@
             <a:fld id="{C3931D62-7DF2-4DB4-910C-5841F65C3738}" type="datetimeFigureOut">
               <a:rPr lang="en-US" smtClean="0"/>
               <a:pPr/>
-              <a:t>3/10/2026</a:t>
+              <a:t>3/15/2026</a:t>
             </a:fld>
             <a:endParaRPr lang="en-US"/>
           </a:p>
@@ -5690,7 +5689,7 @@
             <a:fld id="{C3931D62-7DF2-4DB4-910C-5841F65C3738}" type="datetimeFigureOut">
               <a:rPr lang="en-US" smtClean="0"/>
               <a:pPr/>
-              <a:t>3/10/2026</a:t>
+              <a:t>3/15/2026</a:t>
             </a:fld>
             <a:endParaRPr lang="en-US"/>
           </a:p>
@@ -6073,7 +6072,7 @@
         </p:nvSpPr>
         <p:spPr>
           <a:xfrm>
-            <a:off x="428596" y="642918"/>
+            <a:off x="428596" y="1185848"/>
             <a:ext cx="8358246" cy="2171714"/>
           </a:xfrm>
         </p:spPr>
@@ -6135,19 +6134,7 @@
                   </a:outerShdw>
                 </a:effectLst>
               </a:rPr>
-              <a:t>GUI </a:t>
-            </a:r>
-            <a:r>
-              <a:rPr lang="en-US" sz="4800" b="1" dirty="0" smtClean="0">
-                <a:effectLst>
-                  <a:outerShdw blurRad="38100" dist="38100" dir="2700000" algn="tl">
-                    <a:srgbClr val="000000">
-                      <a:alpha val="43137"/>
-                    </a:srgbClr>
-                  </a:outerShdw>
-                </a:effectLst>
-              </a:rPr>
-              <a:t>Programming with Swing</a:t>
+              <a:t>GUI Programming with Swing</a:t>
             </a:r>
             <a:endParaRPr lang="en-US" sz="4800" b="1" dirty="0">
               <a:effectLst>
@@ -6268,11 +6255,7 @@
           <a:p>
             <a:r>
               <a:rPr lang="en-US" b="1" dirty="0" smtClean="0"/>
-              <a:t>Common Swing </a:t>
-            </a:r>
-            <a:r>
-              <a:rPr lang="en-US" b="1" dirty="0" smtClean="0"/>
-              <a:t>Components</a:t>
+              <a:t>Common Swing Components</a:t>
             </a:r>
             <a:endParaRPr lang="en-US" b="1" dirty="0"/>
           </a:p>
@@ -6310,11 +6293,7 @@
             </a:pPr>
             <a:r>
               <a:rPr lang="en-US" sz="2400" dirty="0" smtClean="0"/>
-              <a:t>All </a:t>
-            </a:r>
-            <a:r>
-              <a:rPr lang="en-US" sz="2400" dirty="0" smtClean="0"/>
-              <a:t>start with </a:t>
+              <a:t>All start with </a:t>
             </a:r>
             <a:r>
               <a:rPr lang="en-US" sz="2400" b="1" dirty="0" smtClean="0"/>
@@ -6726,11 +6705,7 @@
           <a:p>
             <a:r>
               <a:rPr lang="en-US" sz="4000" b="1" dirty="0" smtClean="0"/>
-              <a:t>Screenshot of a simple login form showing swing components</a:t>
-            </a:r>
-            <a:r>
-              <a:rPr lang="en-US" sz="4000" b="1" dirty="0" smtClean="0"/>
-              <a:t>.</a:t>
+              <a:t>Screenshot of a simple login form showing swing components.</a:t>
             </a:r>
             <a:endParaRPr lang="en-US" sz="4000" b="1" dirty="0"/>
           </a:p>
@@ -6827,11 +6802,7 @@
           <a:p>
             <a:r>
               <a:rPr lang="en-US" b="1" dirty="0" smtClean="0"/>
-              <a:t>Managing Component </a:t>
-            </a:r>
-            <a:r>
-              <a:rPr lang="en-US" b="1" dirty="0" smtClean="0"/>
-              <a:t>Placement</a:t>
+              <a:t>Managing Component Placement</a:t>
             </a:r>
             <a:endParaRPr lang="en-US" b="1" dirty="0"/>
           </a:p>
@@ -6864,11 +6835,7 @@
             </a:pPr>
             <a:r>
               <a:rPr lang="en-US" sz="2400" b="1" dirty="0" smtClean="0"/>
-              <a:t>Why</a:t>
-            </a:r>
-            <a:r>
-              <a:rPr lang="en-US" sz="2400" b="1" dirty="0" smtClean="0"/>
-              <a:t>?</a:t>
+              <a:t>Why?</a:t>
             </a:r>
             <a:r>
               <a:rPr lang="en-US" sz="2400" dirty="0" smtClean="0"/>
@@ -7001,13 +6968,8 @@
             </a:r>
             <a:r>
               <a:rPr lang="en-US" sz="2400" dirty="0" smtClean="0"/>
-              <a:t>: Single row or column</a:t>
-            </a:r>
-            <a:r>
-              <a:rPr lang="en-US" sz="2400" dirty="0" smtClean="0"/>
-              <a:t>.</a:t>
-            </a:r>
-            <a:endParaRPr lang="en-US" sz="2400" dirty="0" smtClean="0"/>
+              <a:t>: Single row or column.</a:t>
+            </a:r>
           </a:p>
         </p:txBody>
       </p:sp>
@@ -7232,10 +7194,6 @@
               </a:rPr>
               <a:t>); </a:t>
             </a:r>
-            <a:endParaRPr lang="en-US" sz="2000" b="1" dirty="0" smtClean="0">
-              <a:latin typeface="Courier New" pitchFamily="49" charset="0"/>
-              <a:cs typeface="Courier New" pitchFamily="49" charset="0"/>
-            </a:endParaRPr>
           </a:p>
           <a:p>
             <a:pPr fontAlgn="ctr"/>
@@ -7363,10 +7321,6 @@
               </a:rPr>
               <a:t>("2")); </a:t>
             </a:r>
-            <a:endParaRPr lang="en-US" sz="2000" b="1" dirty="0" smtClean="0">
-              <a:latin typeface="Courier New" pitchFamily="49" charset="0"/>
-              <a:cs typeface="Courier New" pitchFamily="49" charset="0"/>
-            </a:endParaRPr>
           </a:p>
           <a:p>
             <a:pPr fontAlgn="ctr"/>
@@ -7384,17 +7338,8 @@
             <a:pPr lvl="1"/>
             <a:r>
               <a:rPr lang="en-US" sz="2400" dirty="0" smtClean="0"/>
-              <a:t>Combine </a:t>
-            </a:r>
-            <a:r>
-              <a:rPr lang="en-US" sz="2400" dirty="0" smtClean="0"/>
-              <a:t>panels with different layouts to create complex UIs</a:t>
-            </a:r>
-            <a:r>
-              <a:rPr lang="en-US" sz="2400" dirty="0" smtClean="0"/>
-              <a:t>.</a:t>
-            </a:r>
-            <a:endParaRPr lang="en-US" sz="2400" dirty="0" smtClean="0"/>
+              <a:t>Combine panels with different layouts to create complex UIs.</a:t>
+            </a:r>
           </a:p>
           <a:p>
             <a:endParaRPr lang="en-US" sz="2400" dirty="0"/>
@@ -7460,11 +7405,7 @@
             </a:r>
             <a:r>
               <a:rPr lang="en-US" b="1" dirty="0" smtClean="0"/>
-              <a:t> and a 2x2 grid</a:t>
-            </a:r>
-            <a:r>
-              <a:rPr lang="en-US" b="1" dirty="0" smtClean="0"/>
-              <a:t>.</a:t>
+              <a:t> and a 2x2 grid.</a:t>
             </a:r>
             <a:endParaRPr lang="en-US" b="1" dirty="0"/>
           </a:p>
@@ -7561,11 +7502,7 @@
           <a:p>
             <a:r>
               <a:rPr lang="en-US" b="1" dirty="0" smtClean="0"/>
-              <a:t>The Delegation Event </a:t>
-            </a:r>
-            <a:r>
-              <a:rPr lang="en-US" b="1" dirty="0" smtClean="0"/>
-              <a:t>Model</a:t>
+              <a:t>The Delegation Event Model</a:t>
             </a:r>
             <a:endParaRPr lang="en-US" dirty="0"/>
           </a:p>
@@ -7595,11 +7532,7 @@
           <a:p>
             <a:r>
               <a:rPr lang="en-US" sz="2400" b="1" dirty="0" smtClean="0"/>
-              <a:t>How </a:t>
-            </a:r>
-            <a:r>
-              <a:rPr lang="en-US" sz="2400" b="1" dirty="0" smtClean="0"/>
-              <a:t>Events Work</a:t>
+              <a:t>How Events Work</a:t>
             </a:r>
           </a:p>
           <a:p>
@@ -7923,11 +7856,7 @@
           <a:p>
             <a:r>
               <a:rPr lang="en-US" b="1" dirty="0" smtClean="0"/>
-              <a:t>Implementing </a:t>
-            </a:r>
-            <a:r>
-              <a:rPr lang="en-US" b="1" dirty="0" smtClean="0"/>
-              <a:t>Listeners</a:t>
+              <a:t>Implementing Listeners</a:t>
             </a:r>
             <a:endParaRPr lang="en-US" dirty="0"/>
           </a:p>
@@ -7957,11 +7886,7 @@
           <a:p>
             <a:r>
               <a:rPr lang="en-US" sz="2800" dirty="0" smtClean="0"/>
-              <a:t>Handling </a:t>
-            </a:r>
-            <a:r>
-              <a:rPr lang="en-US" sz="2800" dirty="0" smtClean="0"/>
-              <a:t>Button Clicks</a:t>
+              <a:t>Handling Button Clicks</a:t>
             </a:r>
           </a:p>
           <a:p>
@@ -8260,11 +8185,7 @@
           <a:p>
             <a:r>
               <a:rPr lang="en-US" b="1" dirty="0" smtClean="0"/>
-              <a:t>Menus &amp; Standard </a:t>
-            </a:r>
-            <a:r>
-              <a:rPr lang="en-US" b="1" dirty="0" smtClean="0"/>
-              <a:t>Dialogs</a:t>
+              <a:t>Menus &amp; Standard Dialogs</a:t>
             </a:r>
             <a:endParaRPr lang="en-US" b="1" dirty="0"/>
           </a:p>
@@ -8294,11 +8215,7 @@
           <a:p>
             <a:r>
               <a:rPr lang="en-US" sz="2800" dirty="0" smtClean="0"/>
-              <a:t>Menus</a:t>
-            </a:r>
-            <a:r>
-              <a:rPr lang="en-US" sz="2800" dirty="0" smtClean="0"/>
-              <a:t>: </a:t>
+              <a:t>Menus: </a:t>
             </a:r>
             <a:r>
               <a:rPr lang="en-US" sz="2800" dirty="0" err="1" smtClean="0"/>
@@ -8620,11 +8537,7 @@
           <a:p>
             <a:r>
               <a:rPr lang="en-US" b="1" dirty="0" smtClean="0"/>
-              <a:t>Project </a:t>
-            </a:r>
-            <a:r>
-              <a:rPr lang="en-US" b="1" dirty="0" smtClean="0"/>
-              <a:t>Structure</a:t>
+              <a:t>Project Structure</a:t>
             </a:r>
             <a:endParaRPr lang="en-US" dirty="0"/>
           </a:p>
@@ -8655,11 +8568,7 @@
             </a:pPr>
             <a:r>
               <a:rPr lang="en-US" sz="2800" b="1" dirty="0" smtClean="0"/>
-              <a:t>Organizing </a:t>
-            </a:r>
-            <a:r>
-              <a:rPr lang="en-US" sz="2800" b="1" dirty="0" smtClean="0"/>
-              <a:t>a GUI Project</a:t>
+              <a:t>Organizing a GUI Project</a:t>
             </a:r>
           </a:p>
           <a:p>
@@ -8754,132 +8663,76 @@
                 <a:latin typeface="Courier New" pitchFamily="49" charset="0"/>
                 <a:cs typeface="Courier New" pitchFamily="49" charset="0"/>
               </a:rPr>
-              <a:t>        ├── Main.java    </a:t>
-            </a:r>
+              <a:t>        ├── Main.java    (Entry point)</a:t>
+            </a:r>
+          </a:p>
+          <a:p>
             <a:r>
               <a:rPr lang="en-US" sz="2000" b="1" dirty="0" smtClean="0">
                 <a:latin typeface="Courier New" pitchFamily="49" charset="0"/>
                 <a:cs typeface="Courier New" pitchFamily="49" charset="0"/>
               </a:rPr>
-              <a:t>(</a:t>
+              <a:t>        ├── view/        (</a:t>
+            </a:r>
+            <a:r>
+              <a:rPr lang="en-US" sz="2000" b="1" dirty="0" err="1" smtClean="0">
+                <a:latin typeface="Courier New" pitchFamily="49" charset="0"/>
+                <a:cs typeface="Courier New" pitchFamily="49" charset="0"/>
+              </a:rPr>
+              <a:t>JFrames</a:t>
             </a:r>
             <a:r>
               <a:rPr lang="en-US" sz="2000" b="1" dirty="0" smtClean="0">
                 <a:latin typeface="Courier New" pitchFamily="49" charset="0"/>
                 <a:cs typeface="Courier New" pitchFamily="49" charset="0"/>
               </a:rPr>
-              <a:t>Entry point)</a:t>
-            </a:r>
-          </a:p>
-          <a:p>
+              <a:t>, </a:t>
+            </a:r>
+            <a:r>
+              <a:rPr lang="en-US" sz="2000" b="1" dirty="0" err="1" smtClean="0">
+                <a:latin typeface="Courier New" pitchFamily="49" charset="0"/>
+                <a:cs typeface="Courier New" pitchFamily="49" charset="0"/>
+              </a:rPr>
+              <a:t>JPanels</a:t>
+            </a:r>
             <a:r>
               <a:rPr lang="en-US" sz="2000" b="1" dirty="0" smtClean="0">
                 <a:latin typeface="Courier New" pitchFamily="49" charset="0"/>
                 <a:cs typeface="Courier New" pitchFamily="49" charset="0"/>
               </a:rPr>
-              <a:t>        ├── view/        </a:t>
-            </a:r>
+              <a:t>)</a:t>
+            </a:r>
+          </a:p>
+          <a:p>
             <a:r>
               <a:rPr lang="en-US" sz="2000" b="1" dirty="0" smtClean="0">
                 <a:latin typeface="Courier New" pitchFamily="49" charset="0"/>
                 <a:cs typeface="Courier New" pitchFamily="49" charset="0"/>
               </a:rPr>
-              <a:t>(</a:t>
+              <a:t>        ├── controller/  (</a:t>
             </a:r>
             <a:r>
               <a:rPr lang="en-US" sz="2000" b="1" dirty="0" err="1" smtClean="0">
                 <a:latin typeface="Courier New" pitchFamily="49" charset="0"/>
                 <a:cs typeface="Courier New" pitchFamily="49" charset="0"/>
               </a:rPr>
-              <a:t>JFrames</a:t>
+              <a:t>ActionListeners</a:t>
             </a:r>
             <a:r>
               <a:rPr lang="en-US" sz="2000" b="1" dirty="0" smtClean="0">
                 <a:latin typeface="Courier New" pitchFamily="49" charset="0"/>
                 <a:cs typeface="Courier New" pitchFamily="49" charset="0"/>
               </a:rPr>
-              <a:t>, </a:t>
-            </a:r>
-            <a:r>
-              <a:rPr lang="en-US" sz="2000" b="1" dirty="0" err="1" smtClean="0">
-                <a:latin typeface="Courier New" pitchFamily="49" charset="0"/>
-                <a:cs typeface="Courier New" pitchFamily="49" charset="0"/>
-              </a:rPr>
-              <a:t>JPanels</a:t>
-            </a:r>
+              <a:t>, Logic)</a:t>
+            </a:r>
+          </a:p>
+          <a:p>
             <a:r>
               <a:rPr lang="en-US" sz="2000" b="1" dirty="0" smtClean="0">
                 <a:latin typeface="Courier New" pitchFamily="49" charset="0"/>
                 <a:cs typeface="Courier New" pitchFamily="49" charset="0"/>
               </a:rPr>
-              <a:t>)</a:t>
-            </a:r>
-          </a:p>
-          <a:p>
-            <a:r>
-              <a:rPr lang="en-US" sz="2000" b="1" dirty="0" smtClean="0">
-                <a:latin typeface="Courier New" pitchFamily="49" charset="0"/>
-                <a:cs typeface="Courier New" pitchFamily="49" charset="0"/>
-              </a:rPr>
-              <a:t>        ├── controller/  </a:t>
-            </a:r>
-            <a:r>
-              <a:rPr lang="en-US" sz="2000" b="1" dirty="0" smtClean="0">
-                <a:latin typeface="Courier New" pitchFamily="49" charset="0"/>
-                <a:cs typeface="Courier New" pitchFamily="49" charset="0"/>
-              </a:rPr>
-              <a:t>(</a:t>
-            </a:r>
-            <a:r>
-              <a:rPr lang="en-US" sz="2000" b="1" dirty="0" err="1" smtClean="0">
-                <a:latin typeface="Courier New" pitchFamily="49" charset="0"/>
-                <a:cs typeface="Courier New" pitchFamily="49" charset="0"/>
-              </a:rPr>
-              <a:t>ActionListeners</a:t>
-            </a:r>
-            <a:r>
-              <a:rPr lang="en-US" sz="2000" b="1" dirty="0" smtClean="0">
-                <a:latin typeface="Courier New" pitchFamily="49" charset="0"/>
-                <a:cs typeface="Courier New" pitchFamily="49" charset="0"/>
-              </a:rPr>
-              <a:t>, Logic)</a:t>
-            </a:r>
-          </a:p>
-          <a:p>
-            <a:r>
-              <a:rPr lang="en-US" sz="2000" b="1" dirty="0" smtClean="0">
-                <a:latin typeface="Courier New" pitchFamily="49" charset="0"/>
-                <a:cs typeface="Courier New" pitchFamily="49" charset="0"/>
-              </a:rPr>
-              <a:t>       </a:t>
-            </a:r>
-            <a:r>
-              <a:rPr lang="en-US" sz="2000" b="1" dirty="0" smtClean="0">
-                <a:latin typeface="Courier New" pitchFamily="49" charset="0"/>
-                <a:cs typeface="Courier New" pitchFamily="49" charset="0"/>
-              </a:rPr>
-              <a:t> </a:t>
-            </a:r>
-            <a:r>
-              <a:rPr lang="en-US" sz="2000" b="1" dirty="0" smtClean="0">
-                <a:latin typeface="Courier New" pitchFamily="49" charset="0"/>
-                <a:cs typeface="Courier New" pitchFamily="49" charset="0"/>
-              </a:rPr>
-              <a:t>└── model/       </a:t>
-            </a:r>
-            <a:r>
-              <a:rPr lang="en-US" sz="2000" b="1" dirty="0" smtClean="0">
-                <a:latin typeface="Courier New" pitchFamily="49" charset="0"/>
-                <a:cs typeface="Courier New" pitchFamily="49" charset="0"/>
-              </a:rPr>
-              <a:t>(</a:t>
-            </a:r>
-            <a:r>
-              <a:rPr lang="en-US" sz="2000" b="1" dirty="0" smtClean="0">
-                <a:latin typeface="Courier New" pitchFamily="49" charset="0"/>
-                <a:cs typeface="Courier New" pitchFamily="49" charset="0"/>
-              </a:rPr>
-              <a:t>Data classes)</a:t>
+              <a:t>        └── model/       (Data classes)</a:t>
             </a:r>
             <a:endParaRPr lang="en-US" sz="2000" b="1" dirty="0">
               <a:latin typeface="Courier New" pitchFamily="49" charset="0"/>
@@ -8933,15 +8786,7 @@
             </a:pPr>
             <a:r>
               <a:rPr lang="en-US" sz="2400" dirty="0" smtClean="0"/>
-              <a:t>Separates </a:t>
-            </a:r>
-            <a:r>
-              <a:rPr lang="en-US" sz="2400" dirty="0" smtClean="0"/>
-              <a:t>UI from Logic (MVC Pattern</a:t>
-            </a:r>
-            <a:r>
-              <a:rPr lang="en-US" sz="2400" dirty="0" smtClean="0"/>
-              <a:t>).</a:t>
+              <a:t>Separates UI from Logic (MVC Pattern).</a:t>
             </a:r>
           </a:p>
           <a:p>
@@ -8954,11 +8799,7 @@
             </a:pPr>
             <a:r>
               <a:rPr lang="en-US" sz="2400" dirty="0" smtClean="0"/>
-              <a:t>Easier </a:t>
-            </a:r>
-            <a:r>
-              <a:rPr lang="en-US" sz="2400" dirty="0" smtClean="0"/>
-              <a:t>to scale as the app grows.</a:t>
+              <a:t>Easier to scale as the app grows.</a:t>
             </a:r>
           </a:p>
           <a:p>
@@ -9022,6 +8863,13 @@
   <p:clrMapOvr>
     <a:masterClrMapping/>
   </p:clrMapOvr>
+  <p:timing>
+    <p:tnLst>
+      <p:par>
+        <p:cTn id="1" dur="indefinite" restart="never" nodeType="tmRoot"/>
+      </p:par>
+    </p:tnLst>
+  </p:timing>
 </p:sld>
 </file>
 
@@ -9111,11 +8959,7 @@
             </a:pPr>
             <a:r>
               <a:rPr lang="en-US" sz="2400" dirty="0" smtClean="0"/>
-              <a:t>Understand </a:t>
-            </a:r>
-            <a:r>
-              <a:rPr lang="en-US" sz="2400" dirty="0" smtClean="0"/>
-              <a:t>the difference between AWT and Swing.</a:t>
+              <a:t>Understand the difference between AWT and Swing.</a:t>
             </a:r>
           </a:p>
           <a:p>
@@ -9267,11 +9111,7 @@
           <a:p>
             <a:r>
               <a:rPr lang="en-US" b="1" dirty="0" smtClean="0"/>
-              <a:t>Common </a:t>
-            </a:r>
-            <a:r>
-              <a:rPr lang="en-US" b="1" dirty="0" smtClean="0"/>
-              <a:t>Mistakes</a:t>
+              <a:t>Common Mistakes</a:t>
             </a:r>
             <a:endParaRPr lang="en-US" dirty="0"/>
           </a:p>
@@ -9307,11 +9147,7 @@
             </a:pPr>
             <a:r>
               <a:rPr lang="en-US" b="1" dirty="0" smtClean="0"/>
-              <a:t>Package </a:t>
-            </a:r>
-            <a:r>
-              <a:rPr lang="en-US" b="1" dirty="0" smtClean="0"/>
-              <a:t>Pitfalls to Avoid</a:t>
+              <a:t>Package Pitfalls to Avoid</a:t>
             </a:r>
           </a:p>
           <a:p>
@@ -9441,13 +9277,8 @@
             </a:r>
             <a:r>
               <a:rPr lang="en-US" dirty="0" smtClean="0"/>
-              <a:t> for class names</a:t>
-            </a:r>
-            <a:r>
-              <a:rPr lang="en-US" dirty="0" smtClean="0"/>
-              <a:t>.</a:t>
-            </a:r>
-            <a:endParaRPr lang="en-US" dirty="0" smtClean="0"/>
+              <a:t> for class names.</a:t>
+            </a:r>
           </a:p>
         </p:txBody>
       </p:sp>
@@ -9456,6 +9287,13 @@
   <p:clrMapOvr>
     <a:masterClrMapping/>
   </p:clrMapOvr>
+  <p:timing>
+    <p:tnLst>
+      <p:par>
+        <p:cTn id="1" dur="indefinite" restart="never" nodeType="tmRoot"/>
+      </p:par>
+    </p:tnLst>
+  </p:timing>
 </p:sld>
 </file>
 
@@ -9500,11 +9338,7 @@
           <a:p>
             <a:r>
               <a:rPr lang="en-US" b="1" dirty="0" smtClean="0"/>
-              <a:t>The Event Dispatch Thread (EDT</a:t>
-            </a:r>
-            <a:r>
-              <a:rPr lang="en-US" b="1" dirty="0" smtClean="0"/>
-              <a:t>)</a:t>
+              <a:t>The Event Dispatch Thread (EDT)</a:t>
             </a:r>
             <a:endParaRPr lang="en-US" b="1" dirty="0"/>
           </a:p>
@@ -9542,11 +9376,7 @@
             </a:pPr>
             <a:r>
               <a:rPr lang="en-US" sz="2400" dirty="0" smtClean="0"/>
-              <a:t>Thread </a:t>
-            </a:r>
-            <a:r>
-              <a:rPr lang="en-US" sz="2400" dirty="0" smtClean="0"/>
-              <a:t>Safety in Swing</a:t>
+              <a:t>Thread Safety in Swing</a:t>
             </a:r>
           </a:p>
           <a:p>
@@ -9817,11 +9647,7 @@
           <a:p>
             <a:r>
               <a:rPr lang="en-US" b="1" dirty="0" smtClean="0"/>
-              <a:t>Pluggable Look and </a:t>
-            </a:r>
-            <a:r>
-              <a:rPr lang="en-US" b="1" dirty="0" smtClean="0"/>
-              <a:t>Feel</a:t>
+              <a:t>Pluggable Look and Feel</a:t>
             </a:r>
             <a:endParaRPr lang="en-US" b="1" dirty="0"/>
           </a:p>
@@ -9859,11 +9685,7 @@
             </a:pPr>
             <a:r>
               <a:rPr lang="en-US" sz="2400" dirty="0" smtClean="0"/>
-              <a:t>Swing </a:t>
-            </a:r>
-            <a:r>
-              <a:rPr lang="en-US" sz="2400" dirty="0" smtClean="0"/>
-              <a:t>allows changing the UI skin at runtime.</a:t>
+              <a:t>Swing allows changing the UI skin at runtime.</a:t>
             </a:r>
           </a:p>
           <a:p>
@@ -10101,11 +9923,7 @@
             </a:pPr>
             <a:r>
               <a:rPr lang="en-US" sz="2400" dirty="0" smtClean="0"/>
-              <a:t>Java's Must be set before creating any components</a:t>
-            </a:r>
-            <a:r>
-              <a:rPr lang="en-US" sz="2400" dirty="0" smtClean="0"/>
-              <a:t>.</a:t>
+              <a:t>Java's Must be set before creating any components.</a:t>
             </a:r>
             <a:endParaRPr kumimoji="0" lang="en-US" sz="2400" b="0" i="0" u="none" strike="noStrike" kern="1200" cap="none" spc="0" normalizeH="0" baseline="0" noProof="0" dirty="0">
               <a:ln>
@@ -10180,11 +9998,7 @@
           <a:p>
             <a:r>
               <a:rPr lang="en-US" b="1" dirty="0" smtClean="0"/>
-              <a:t>Putting It All </a:t>
-            </a:r>
-            <a:r>
-              <a:rPr lang="en-US" b="1" dirty="0" smtClean="0"/>
-              <a:t>Together</a:t>
+              <a:t>Putting It All Together</a:t>
             </a:r>
             <a:endParaRPr lang="en-US" b="1" dirty="0"/>
           </a:p>
@@ -10222,11 +10036,7 @@
             </a:pPr>
             <a:r>
               <a:rPr lang="en-US" sz="2400" dirty="0" smtClean="0"/>
-              <a:t>Task</a:t>
-            </a:r>
-            <a:r>
-              <a:rPr lang="en-US" sz="2400" dirty="0" smtClean="0"/>
-              <a:t>: Create a Temperature Converter.</a:t>
+              <a:t>Task: Create a Temperature Converter.</a:t>
             </a:r>
           </a:p>
           <a:p>
@@ -10442,15 +10252,7 @@
           <a:p>
             <a:r>
               <a:rPr lang="en-US" b="1" dirty="0" smtClean="0"/>
-              <a:t>Summary </a:t>
-            </a:r>
-            <a:r>
-              <a:rPr lang="en-US" b="1" dirty="0" smtClean="0"/>
-              <a:t>&amp; Next </a:t>
-            </a:r>
-            <a:r>
-              <a:rPr lang="en-US" b="1" dirty="0" smtClean="0"/>
-              <a:t>Steps</a:t>
+              <a:t>Summary &amp; Next Steps</a:t>
             </a:r>
             <a:endParaRPr lang="en-US" b="1" dirty="0"/>
           </a:p>
@@ -10678,144 +10480,6 @@
               <a:rPr lang="en-US" sz="2400" dirty="0" smtClean="0"/>
               <a:t>).</a:t>
             </a:r>
-            <a:endParaRPr lang="en-US" sz="2400" dirty="0" smtClean="0"/>
-          </a:p>
-        </p:txBody>
-      </p:sp>
-    </p:spTree>
-  </p:cSld>
-  <p:clrMapOvr>
-    <a:masterClrMapping/>
-  </p:clrMapOvr>
-  <p:timing>
-    <p:tnLst>
-      <p:par>
-        <p:cTn id="1" dur="indefinite" restart="never" nodeType="tmRoot"/>
-      </p:par>
-    </p:tnLst>
-  </p:timing>
-</p:sld>
-</file>
-
-<file path=ppt/slides/slide25.xml><?xml version="1.0" encoding="utf-8"?>
-<p:sld xmlns:a="http://schemas.openxmlformats.org/drawingml/2006/main" xmlns:r="http://schemas.openxmlformats.org/officeDocument/2006/relationships" xmlns:p="http://schemas.openxmlformats.org/presentationml/2006/main">
-  <p:cSld>
-    <p:spTree>
-      <p:nvGrpSpPr>
-        <p:cNvPr id="1" name=""/>
-        <p:cNvGrpSpPr/>
-        <p:nvPr/>
-      </p:nvGrpSpPr>
-      <p:grpSpPr>
-        <a:xfrm>
-          <a:off x="0" y="0"/>
-          <a:ext cx="0" cy="0"/>
-          <a:chOff x="0" y="0"/>
-          <a:chExt cx="0" cy="0"/>
-        </a:xfrm>
-      </p:grpSpPr>
-      <p:sp>
-        <p:nvSpPr>
-          <p:cNvPr id="2" name="Title 1"/>
-          <p:cNvSpPr>
-            <a:spLocks noGrp="1"/>
-          </p:cNvSpPr>
-          <p:nvPr>
-            <p:ph type="title"/>
-          </p:nvPr>
-        </p:nvSpPr>
-        <p:spPr>
-          <a:xfrm>
-            <a:off x="457200" y="1071554"/>
-            <a:ext cx="8229600" cy="1143000"/>
-          </a:xfrm>
-        </p:spPr>
-        <p:txBody>
-          <a:bodyPr>
-            <a:noAutofit/>
-          </a:bodyPr>
-          <a:lstStyle/>
-          <a:p>
-            <a:r>
-              <a:rPr lang="en-US" sz="9600" b="1" dirty="0" smtClean="0"/>
-              <a:t>Assignment 1</a:t>
-            </a:r>
-            <a:endParaRPr lang="en-US" sz="9600" b="1" dirty="0"/>
-          </a:p>
-        </p:txBody>
-      </p:sp>
-      <p:sp>
-        <p:nvSpPr>
-          <p:cNvPr id="3" name="Content Placeholder 2"/>
-          <p:cNvSpPr>
-            <a:spLocks noGrp="1"/>
-          </p:cNvSpPr>
-          <p:nvPr>
-            <p:ph idx="1"/>
-          </p:nvPr>
-        </p:nvSpPr>
-        <p:spPr>
-          <a:xfrm>
-            <a:off x="0" y="3286124"/>
-            <a:ext cx="9144000" cy="785818"/>
-          </a:xfrm>
-        </p:spPr>
-        <p:txBody>
-          <a:bodyPr>
-            <a:noAutofit/>
-          </a:bodyPr>
-          <a:lstStyle/>
-          <a:p>
-            <a:pPr>
-              <a:buNone/>
-            </a:pPr>
-            <a:r>
-              <a:rPr lang="en-US" sz="4000" dirty="0" smtClean="0">
-                <a:effectLst>
-                  <a:outerShdw blurRad="38100" dist="38100" dir="2700000" algn="tl">
-                    <a:srgbClr val="000000">
-                      <a:alpha val="43137"/>
-                    </a:srgbClr>
-                  </a:outerShdw>
-                </a:effectLst>
-              </a:rPr>
-              <a:t>https://</a:t>
-            </a:r>
-            <a:r>
-              <a:rPr lang="en-US" sz="4000" dirty="0" smtClean="0">
-                <a:effectLst>
-                  <a:outerShdw blurRad="38100" dist="38100" dir="2700000" algn="tl">
-                    <a:srgbClr val="000000">
-                      <a:alpha val="43137"/>
-                    </a:srgbClr>
-                  </a:outerShdw>
-                </a:effectLst>
-              </a:rPr>
-              <a:t>classroom.github.com/a/4FKAK09X</a:t>
-            </a:r>
-            <a:endParaRPr lang="en-US" sz="4000" dirty="0" smtClean="0">
-              <a:effectLst>
-                <a:outerShdw blurRad="38100" dist="38100" dir="2700000" algn="tl">
-                  <a:srgbClr val="000000">
-                    <a:alpha val="43137"/>
-                  </a:srgbClr>
-                </a:outerShdw>
-              </a:effectLst>
-            </a:endParaRPr>
-          </a:p>
-          <a:p>
-            <a:pPr>
-              <a:buNone/>
-            </a:pPr>
-            <a:endParaRPr lang="en-US" sz="4000" dirty="0">
-              <a:effectLst>
-                <a:outerShdw blurRad="38100" dist="38100" dir="2700000" algn="tl">
-                  <a:srgbClr val="000000">
-                    <a:alpha val="43137"/>
-                  </a:srgbClr>
-                </a:outerShdw>
-              </a:effectLst>
-            </a:endParaRPr>
           </a:p>
         </p:txBody>
       </p:sp>
@@ -10870,11 +10534,7 @@
           <a:p>
             <a:r>
               <a:rPr lang="en-US" b="1" dirty="0" smtClean="0"/>
-              <a:t>Understanding Java </a:t>
-            </a:r>
-            <a:r>
-              <a:rPr lang="en-US" b="1" dirty="0" smtClean="0"/>
-              <a:t>Packages</a:t>
+              <a:t>Understanding Java Packages</a:t>
             </a:r>
             <a:endParaRPr lang="en-US" b="1" dirty="0"/>
           </a:p>
@@ -10904,11 +10564,7 @@
           <a:p>
             <a:r>
               <a:rPr lang="en-US" sz="2400" dirty="0" smtClean="0"/>
-              <a:t>A </a:t>
-            </a:r>
-            <a:r>
-              <a:rPr lang="en-US" sz="2400" dirty="0" smtClean="0"/>
-              <a:t>namespace that organizes a set of related classes and interfaces.</a:t>
+              <a:t>A namespace that organizes a set of related classes and interfaces.</a:t>
             </a:r>
           </a:p>
           <a:p>
@@ -11090,11 +10746,7 @@
           <a:p>
             <a:r>
               <a:rPr lang="en-US" b="1" dirty="0" smtClean="0"/>
-              <a:t>Avoiding Naming </a:t>
-            </a:r>
-            <a:r>
-              <a:rPr lang="en-US" b="1" dirty="0" smtClean="0"/>
-              <a:t>Conflicts</a:t>
+              <a:t>Avoiding Naming Conflicts</a:t>
             </a:r>
             <a:endParaRPr lang="en-US" b="1" dirty="0"/>
           </a:p>
@@ -11132,11 +10784,7 @@
             </a:pPr>
             <a:r>
               <a:rPr lang="en-US" sz="2400" dirty="0" smtClean="0"/>
-              <a:t>Java </a:t>
-            </a:r>
-            <a:r>
-              <a:rPr lang="en-US" sz="2400" dirty="0" smtClean="0"/>
-              <a:t>has thousands of built-in classes. Sometimes they have the same name.</a:t>
+              <a:t>Java has thousands of built-in classes. Sometimes they have the same name.</a:t>
             </a:r>
           </a:p>
           <a:p>
@@ -11507,11 +11155,7 @@
           <a:p>
             <a:r>
               <a:rPr lang="en-US" sz="2400" dirty="0" smtClean="0"/>
-              <a:t>Allows </a:t>
-            </a:r>
-            <a:r>
-              <a:rPr lang="en-US" sz="2400" dirty="0" smtClean="0"/>
-              <a:t>you to use classes without typing the full package name.</a:t>
+              <a:t>Allows you to use classes without typing the full package name.</a:t>
             </a:r>
           </a:p>
           <a:p>
@@ -11668,11 +11312,7 @@
             </a:pPr>
             <a:r>
               <a:rPr lang="en-US" sz="2400" b="1" dirty="0" smtClean="0"/>
-              <a:t>Wildcard </a:t>
-            </a:r>
-            <a:r>
-              <a:rPr lang="en-US" sz="2400" b="1" dirty="0" smtClean="0"/>
-              <a:t>Import (Use with Caution):</a:t>
+              <a:t>Wildcard Import (Use with Caution):</a:t>
             </a:r>
             <a:endParaRPr kumimoji="0" lang="en-US" sz="2400" b="0" i="0" u="none" strike="noStrike" kern="1200" cap="none" spc="0" normalizeH="0" baseline="0" noProof="0" dirty="0">
               <a:ln>
@@ -11751,10 +11391,6 @@
               </a:rPr>
               <a:t>.*;</a:t>
             </a:r>
-            <a:endParaRPr lang="en-US" sz="2400" b="1" dirty="0" smtClean="0">
-              <a:latin typeface="Courier New" pitchFamily="49" charset="0"/>
-              <a:cs typeface="Courier New" pitchFamily="49" charset="0"/>
-            </a:endParaRPr>
           </a:p>
         </p:txBody>
       </p:sp>
@@ -11810,13 +11446,8 @@
             </a:r>
             <a:r>
               <a:rPr lang="en-US" sz="2400" dirty="0" smtClean="0"/>
-              <a:t> class</a:t>
-            </a:r>
-            <a:r>
-              <a:rPr lang="en-US" sz="2400" dirty="0" smtClean="0"/>
-              <a:t>.</a:t>
-            </a:r>
-            <a:endParaRPr lang="en-US" sz="2400" dirty="0" smtClean="0"/>
+              <a:t> class.</a:t>
+            </a:r>
           </a:p>
         </p:txBody>
       </p:sp>
@@ -11875,11 +11506,7 @@
             </a:r>
             <a:r>
               <a:rPr lang="en-US" b="1" dirty="0" smtClean="0"/>
-              <a:t>: AWT vs. </a:t>
-            </a:r>
-            <a:r>
-              <a:rPr lang="en-US" b="1" dirty="0" smtClean="0"/>
-              <a:t>Swing</a:t>
+              <a:t>: AWT vs. Swing</a:t>
             </a:r>
             <a:endParaRPr lang="en-US" b="1" dirty="0"/>
           </a:p>
@@ -11909,11 +11536,7 @@
           <a:p>
             <a:r>
               <a:rPr lang="en-US" b="1" dirty="0" smtClean="0"/>
-              <a:t>AWT </a:t>
-            </a:r>
-            <a:r>
-              <a:rPr lang="en-US" b="1" dirty="0" smtClean="0"/>
-              <a:t>(Abstract Window Toolkit):</a:t>
+              <a:t>AWT (Abstract Window Toolkit):</a:t>
             </a:r>
             <a:endParaRPr lang="en-US" dirty="0" smtClean="0"/>
           </a:p>
@@ -12078,19 +11701,7 @@
                   </a:outerShdw>
                 </a:effectLst>
               </a:rPr>
-              <a:t>Controlling Access (Encapsulation</a:t>
-            </a:r>
-            <a:r>
-              <a:rPr lang="en-US" b="1" dirty="0" smtClean="0">
-                <a:effectLst>
-                  <a:outerShdw blurRad="38100" dist="38100" dir="2700000" algn="tl">
-                    <a:srgbClr val="000000">
-                      <a:alpha val="43137"/>
-                    </a:srgbClr>
-                  </a:outerShdw>
-                </a:effectLst>
-              </a:rPr>
-              <a:t>)</a:t>
+              <a:t>Controlling Access (Encapsulation)</a:t>
             </a:r>
             <a:endParaRPr lang="en-US" b="1" dirty="0">
               <a:effectLst>
@@ -12128,11 +11739,7 @@
           <a:p>
             <a:r>
               <a:rPr lang="en-US" sz="2400" dirty="0" smtClean="0"/>
-              <a:t>Packages </a:t>
-            </a:r>
-            <a:r>
-              <a:rPr lang="en-US" sz="2400" dirty="0" smtClean="0"/>
-              <a:t>work closely with access modifiers.</a:t>
+              <a:t>Packages work closely with access modifiers.</a:t>
             </a:r>
           </a:p>
           <a:p>
@@ -12314,19 +11921,8 @@
                 <a:latin typeface="Courier New" pitchFamily="49" charset="0"/>
                 <a:cs typeface="Courier New" pitchFamily="49" charset="0"/>
               </a:rPr>
-              <a:t>() { ... </a:t>
-            </a:r>
-            <a:r>
-              <a:rPr lang="en-US" sz="2000" b="1" dirty="0" smtClean="0">
-                <a:latin typeface="Courier New" pitchFamily="49" charset="0"/>
-                <a:cs typeface="Courier New" pitchFamily="49" charset="0"/>
-              </a:rPr>
-              <a:t>}</a:t>
-            </a:r>
-            <a:endParaRPr lang="en-US" sz="2000" b="1" dirty="0" smtClean="0">
-              <a:latin typeface="Courier New" pitchFamily="49" charset="0"/>
-              <a:cs typeface="Courier New" pitchFamily="49" charset="0"/>
-            </a:endParaRPr>
+              <a:t>() { ... }</a:t>
+            </a:r>
           </a:p>
           <a:p>
             <a:r>
@@ -12399,11 +11995,7 @@
           <a:p>
             <a:r>
               <a:rPr lang="en-US" b="1" dirty="0" smtClean="0"/>
-              <a:t>The Swing </a:t>
-            </a:r>
-            <a:r>
-              <a:rPr lang="en-US" b="1" dirty="0" smtClean="0"/>
-              <a:t>Architecture</a:t>
+              <a:t>The Swing Architecture</a:t>
             </a:r>
             <a:endParaRPr lang="en-US" b="1" dirty="0"/>
           </a:p>
@@ -12564,13 +12156,8 @@
             </a:r>
             <a:r>
               <a:rPr lang="en-US" sz="2400" dirty="0" smtClean="0"/>
-              <a:t> (Deprecated, web-based</a:t>
-            </a:r>
-            <a:r>
-              <a:rPr lang="en-US" sz="2400" dirty="0" smtClean="0"/>
-              <a:t>).</a:t>
-            </a:r>
-            <a:endParaRPr lang="en-US" sz="2400" dirty="0" smtClean="0"/>
+              <a:t> (Deprecated, web-based).</a:t>
+            </a:r>
           </a:p>
         </p:txBody>
       </p:sp>
@@ -12680,11 +12267,7 @@
             </a:r>
             <a:r>
               <a:rPr lang="en-US" sz="2400" dirty="0" smtClean="0"/>
-              <a:t> </a:t>
-            </a:r>
-            <a:r>
-              <a:rPr lang="en-US" sz="2400" dirty="0" smtClean="0"/>
-              <a:t>represents the main application window.</a:t>
+              <a:t> represents the main application window.</a:t>
             </a:r>
           </a:p>
           <a:p>
